--- a/Day 2 files/Geostatistical data analysis 1.pptx
+++ b/Day 2 files/Geostatistical data analysis 1.pptx
@@ -162,7 +162,7 @@
   <pc:docChgLst>
     <pc:chgData name="Edson Utazi" userId="bcb3a38a-3ad0-4389-89a4-f1f4b25807d3" providerId="ADAL" clId="{6E6BB287-36A5-4019-B86C-EECBD7B9E602}"/>
     <pc:docChg chg="undo custSel addSld delSld modSld sldOrd modMainMaster">
-      <pc:chgData name="Edson Utazi" userId="bcb3a38a-3ad0-4389-89a4-f1f4b25807d3" providerId="ADAL" clId="{6E6BB287-36A5-4019-B86C-EECBD7B9E602}" dt="2026-10-09T08:55:48.094" v="2863" actId="1076"/>
+      <pc:chgData name="Edson Utazi" userId="bcb3a38a-3ad0-4389-89a4-f1f4b25807d3" providerId="ADAL" clId="{6E6BB287-36A5-4019-B86C-EECBD7B9E602}" dt="2026-10-09T09:05:43.745" v="3204" actId="1076"/>
       <pc:docMkLst>
         <pc:docMk/>
       </pc:docMkLst>
@@ -236,7 +236,7 @@
         </pc:spChg>
       </pc:sldChg>
       <pc:sldChg chg="modSp mod ord">
-        <pc:chgData name="Edson Utazi" userId="bcb3a38a-3ad0-4389-89a4-f1f4b25807d3" providerId="ADAL" clId="{6E6BB287-36A5-4019-B86C-EECBD7B9E602}" dt="2026-10-09T08:52:59.666" v="2707"/>
+        <pc:chgData name="Edson Utazi" userId="bcb3a38a-3ad0-4389-89a4-f1f4b25807d3" providerId="ADAL" clId="{6E6BB287-36A5-4019-B86C-EECBD7B9E602}" dt="2026-10-09T09:05:43.745" v="3204" actId="1076"/>
         <pc:sldMkLst>
           <pc:docMk/>
           <pc:sldMk cId="3093278351" sldId="265"/>
@@ -250,7 +250,7 @@
           </ac:spMkLst>
         </pc:spChg>
         <pc:spChg chg="mod">
-          <ac:chgData name="Edson Utazi" userId="bcb3a38a-3ad0-4389-89a4-f1f4b25807d3" providerId="ADAL" clId="{6E6BB287-36A5-4019-B86C-EECBD7B9E602}" dt="2026-10-09T08:52:08.356" v="2703" actId="20577"/>
+          <ac:chgData name="Edson Utazi" userId="bcb3a38a-3ad0-4389-89a4-f1f4b25807d3" providerId="ADAL" clId="{6E6BB287-36A5-4019-B86C-EECBD7B9E602}" dt="2026-10-09T09:05:43.745" v="3204" actId="1076"/>
           <ac:spMkLst>
             <pc:docMk/>
             <pc:sldMk cId="3093278351" sldId="265"/>
@@ -1303,7 +1303,7 @@
           <a:p>
             <a:fld id="{3B923571-5F2F-4146-9E82-0F7B410E984A}" type="datetimeFigureOut">
               <a:rPr lang="en-GB" smtClean="0"/>
-              <a:t>08/10/2026</a:t>
+              <a:t>09/10/2026</a:t>
             </a:fld>
             <a:endParaRPr lang="en-GB"/>
           </a:p>
@@ -1832,7 +1832,7 @@
           <a:p>
             <a:fld id="{D2373E64-C9E2-441C-8BD5-3707FDEA1722}" type="datetimeFigureOut">
               <a:rPr lang="en-GB" smtClean="0"/>
-              <a:t>08/10/2026</a:t>
+              <a:t>09/10/2026</a:t>
             </a:fld>
             <a:endParaRPr lang="en-GB"/>
           </a:p>
@@ -2002,7 +2002,7 @@
           <a:p>
             <a:fld id="{D2373E64-C9E2-441C-8BD5-3707FDEA1722}" type="datetimeFigureOut">
               <a:rPr lang="en-GB" smtClean="0"/>
-              <a:t>08/10/2026</a:t>
+              <a:t>09/10/2026</a:t>
             </a:fld>
             <a:endParaRPr lang="en-GB"/>
           </a:p>
@@ -2182,7 +2182,7 @@
           <a:p>
             <a:fld id="{D2373E64-C9E2-441C-8BD5-3707FDEA1722}" type="datetimeFigureOut">
               <a:rPr lang="en-GB" smtClean="0"/>
-              <a:t>08/10/2026</a:t>
+              <a:t>09/10/2026</a:t>
             </a:fld>
             <a:endParaRPr lang="en-GB"/>
           </a:p>
@@ -2580,7 +2580,7 @@
           <a:p>
             <a:fld id="{D2373E64-C9E2-441C-8BD5-3707FDEA1722}" type="datetimeFigureOut">
               <a:rPr lang="en-GB" smtClean="0"/>
-              <a:t>08/10/2026</a:t>
+              <a:t>09/10/2026</a:t>
             </a:fld>
             <a:endParaRPr lang="en-GB"/>
           </a:p>
@@ -2826,7 +2826,7 @@
           <a:p>
             <a:fld id="{D2373E64-C9E2-441C-8BD5-3707FDEA1722}" type="datetimeFigureOut">
               <a:rPr lang="en-GB" smtClean="0"/>
-              <a:t>08/10/2026</a:t>
+              <a:t>09/10/2026</a:t>
             </a:fld>
             <a:endParaRPr lang="en-GB"/>
           </a:p>
@@ -3058,7 +3058,7 @@
           <a:p>
             <a:fld id="{D2373E64-C9E2-441C-8BD5-3707FDEA1722}" type="datetimeFigureOut">
               <a:rPr lang="en-GB" smtClean="0"/>
-              <a:t>08/10/2026</a:t>
+              <a:t>09/10/2026</a:t>
             </a:fld>
             <a:endParaRPr lang="en-GB"/>
           </a:p>
@@ -3425,7 +3425,7 @@
           <a:p>
             <a:fld id="{D2373E64-C9E2-441C-8BD5-3707FDEA1722}" type="datetimeFigureOut">
               <a:rPr lang="en-GB" smtClean="0"/>
-              <a:t>08/10/2026</a:t>
+              <a:t>09/10/2026</a:t>
             </a:fld>
             <a:endParaRPr lang="en-GB"/>
           </a:p>
@@ -3543,7 +3543,7 @@
           <a:p>
             <a:fld id="{D2373E64-C9E2-441C-8BD5-3707FDEA1722}" type="datetimeFigureOut">
               <a:rPr lang="en-GB" smtClean="0"/>
-              <a:t>08/10/2026</a:t>
+              <a:t>09/10/2026</a:t>
             </a:fld>
             <a:endParaRPr lang="en-GB"/>
           </a:p>
@@ -3638,7 +3638,7 @@
           <a:p>
             <a:fld id="{D2373E64-C9E2-441C-8BD5-3707FDEA1722}" type="datetimeFigureOut">
               <a:rPr lang="en-GB" smtClean="0"/>
-              <a:t>08/10/2026</a:t>
+              <a:t>09/10/2026</a:t>
             </a:fld>
             <a:endParaRPr lang="en-GB"/>
           </a:p>
@@ -3915,7 +3915,7 @@
           <a:p>
             <a:fld id="{D2373E64-C9E2-441C-8BD5-3707FDEA1722}" type="datetimeFigureOut">
               <a:rPr lang="en-GB" smtClean="0"/>
-              <a:t>08/10/2026</a:t>
+              <a:t>09/10/2026</a:t>
             </a:fld>
             <a:endParaRPr lang="en-GB"/>
           </a:p>
@@ -4168,7 +4168,7 @@
           <a:p>
             <a:fld id="{D2373E64-C9E2-441C-8BD5-3707FDEA1722}" type="datetimeFigureOut">
               <a:rPr lang="en-GB" smtClean="0"/>
-              <a:t>08/10/2026</a:t>
+              <a:t>09/10/2026</a:t>
             </a:fld>
             <a:endParaRPr lang="en-GB"/>
           </a:p>
@@ -4381,7 +4381,7 @@
           <a:p>
             <a:fld id="{D2373E64-C9E2-441C-8BD5-3707FDEA1722}" type="datetimeFigureOut">
               <a:rPr lang="en-GB" smtClean="0"/>
-              <a:t>08/10/2026</a:t>
+              <a:t>09/10/2026</a:t>
             </a:fld>
             <a:endParaRPr lang="en-GB"/>
           </a:p>
@@ -5359,8 +5359,8 @@
           </a:p>
         </p:txBody>
       </p:sp>
-      <mc:AlternateContent xmlns:mc="http://schemas.openxmlformats.org/markup-compatibility/2006">
-        <mc:Choice xmlns:a14="http://schemas.microsoft.com/office/drawing/2010/main" Requires="a14">
+      <mc:AlternateContent xmlns:mc="http://schemas.openxmlformats.org/markup-compatibility/2006" xmlns:a14="http://schemas.microsoft.com/office/drawing/2010/main">
+        <mc:Choice Requires="a14">
           <p:sp>
             <p:nvSpPr>
               <p:cNvPr id="3" name="Content Placeholder 2"/>
@@ -5654,7 +5654,7 @@
             </p:txBody>
           </p:sp>
         </mc:Choice>
-        <mc:Fallback>
+        <mc:Fallback xmlns="">
           <p:sp>
             <p:nvSpPr>
               <p:cNvPr id="3" name="Content Placeholder 2"/>
@@ -6072,8 +6072,8 @@
           </a:p>
         </p:txBody>
       </p:sp>
-      <mc:AlternateContent xmlns:mc="http://schemas.openxmlformats.org/markup-compatibility/2006">
-        <mc:Choice xmlns:a14="http://schemas.microsoft.com/office/drawing/2010/main" Requires="a14">
+      <mc:AlternateContent xmlns:mc="http://schemas.openxmlformats.org/markup-compatibility/2006" xmlns:a14="http://schemas.microsoft.com/office/drawing/2010/main">
+        <mc:Choice Requires="a14">
           <p:sp>
             <p:nvSpPr>
               <p:cNvPr id="3" name="Content Placeholder 2"/>
@@ -6561,7 +6561,7 @@
             </p:txBody>
           </p:sp>
         </mc:Choice>
-        <mc:Fallback>
+        <mc:Fallback xmlns="">
           <p:sp>
             <p:nvSpPr>
               <p:cNvPr id="3" name="Content Placeholder 2"/>
@@ -6629,8 +6629,8 @@
           <a:chExt cx="0" cy="0"/>
         </a:xfrm>
       </p:grpSpPr>
-      <mc:AlternateContent xmlns:mc="http://schemas.openxmlformats.org/markup-compatibility/2006">
-        <mc:Choice xmlns:a14="http://schemas.microsoft.com/office/drawing/2010/main" Requires="a14">
+      <mc:AlternateContent xmlns:mc="http://schemas.openxmlformats.org/markup-compatibility/2006" xmlns:a14="http://schemas.microsoft.com/office/drawing/2010/main">
+        <mc:Choice Requires="a14">
           <p:sp>
             <p:nvSpPr>
               <p:cNvPr id="3" name="Content Placeholder 2"/>
@@ -7623,7 +7623,7 @@
             </p:txBody>
           </p:sp>
         </mc:Choice>
-        <mc:Fallback>
+        <mc:Fallback xmlns="">
           <p:sp>
             <p:nvSpPr>
               <p:cNvPr id="3" name="Content Placeholder 2"/>
@@ -7752,8 +7752,8 @@
           <a:chExt cx="0" cy="0"/>
         </a:xfrm>
       </p:grpSpPr>
-      <mc:AlternateContent xmlns:mc="http://schemas.openxmlformats.org/markup-compatibility/2006">
-        <mc:Choice xmlns:a14="http://schemas.microsoft.com/office/drawing/2010/main" Requires="a14">
+      <mc:AlternateContent xmlns:mc="http://schemas.openxmlformats.org/markup-compatibility/2006" xmlns:a14="http://schemas.microsoft.com/office/drawing/2010/main">
+        <mc:Choice Requires="a14">
           <p:sp>
             <p:nvSpPr>
               <p:cNvPr id="3" name="Content Placeholder 2"/>
@@ -7868,7 +7868,7 @@
             </p:txBody>
           </p:sp>
         </mc:Choice>
-        <mc:Fallback>
+        <mc:Fallback xmlns="">
           <p:sp>
             <p:nvSpPr>
               <p:cNvPr id="3" name="Content Placeholder 2"/>
@@ -8071,8 +8071,8 @@
           </a:p>
         </p:txBody>
       </p:sp>
-      <mc:AlternateContent xmlns:mc="http://schemas.openxmlformats.org/markup-compatibility/2006">
-        <mc:Choice xmlns:a14="http://schemas.microsoft.com/office/drawing/2010/main" Requires="a14">
+      <mc:AlternateContent xmlns:mc="http://schemas.openxmlformats.org/markup-compatibility/2006" xmlns:a14="http://schemas.microsoft.com/office/drawing/2010/main">
+        <mc:Choice Requires="a14">
           <p:sp>
             <p:nvSpPr>
               <p:cNvPr id="3" name="Content Placeholder 2"/>
@@ -8666,7 +8666,7 @@
             </p:txBody>
           </p:sp>
         </mc:Choice>
-        <mc:Fallback>
+        <mc:Fallback xmlns="">
           <p:sp>
             <p:nvSpPr>
               <p:cNvPr id="3" name="Content Placeholder 2"/>
@@ -8898,8 +8898,8 @@
           </a:p>
         </p:txBody>
       </p:sp>
-      <mc:AlternateContent xmlns:mc="http://schemas.openxmlformats.org/markup-compatibility/2006">
-        <mc:Choice xmlns:a14="http://schemas.microsoft.com/office/drawing/2010/main" Requires="a14">
+      <mc:AlternateContent xmlns:mc="http://schemas.openxmlformats.org/markup-compatibility/2006" xmlns:a14="http://schemas.microsoft.com/office/drawing/2010/main">
+        <mc:Choice Requires="a14">
           <p:sp>
             <p:nvSpPr>
               <p:cNvPr id="3" name="Content Placeholder 2"/>
@@ -9056,7 +9056,7 @@
             </p:txBody>
           </p:sp>
         </mc:Choice>
-        <mc:Fallback>
+        <mc:Fallback xmlns="">
           <p:sp>
             <p:nvSpPr>
               <p:cNvPr id="3" name="Content Placeholder 2"/>
@@ -9124,8 +9124,8 @@
           <a:chExt cx="0" cy="0"/>
         </a:xfrm>
       </p:grpSpPr>
-      <mc:AlternateContent xmlns:mc="http://schemas.openxmlformats.org/markup-compatibility/2006">
-        <mc:Choice xmlns:a14="http://schemas.microsoft.com/office/drawing/2010/main" Requires="a14">
+      <mc:AlternateContent xmlns:mc="http://schemas.openxmlformats.org/markup-compatibility/2006" xmlns:a14="http://schemas.microsoft.com/office/drawing/2010/main">
+        <mc:Choice Requires="a14">
           <p:sp>
             <p:nvSpPr>
               <p:cNvPr id="3" name="Content Placeholder 2"/>
@@ -9503,7 +9503,7 @@
             </p:txBody>
           </p:sp>
         </mc:Choice>
-        <mc:Fallback>
+        <mc:Fallback xmlns="">
           <p:sp>
             <p:nvSpPr>
               <p:cNvPr id="3" name="Content Placeholder 2"/>
@@ -9614,8 +9614,8 @@
           <a:chExt cx="0" cy="0"/>
         </a:xfrm>
       </p:grpSpPr>
-      <mc:AlternateContent xmlns:mc="http://schemas.openxmlformats.org/markup-compatibility/2006">
-        <mc:Choice xmlns:a14="http://schemas.microsoft.com/office/drawing/2010/main" Requires="a14">
+      <mc:AlternateContent xmlns:mc="http://schemas.openxmlformats.org/markup-compatibility/2006" xmlns:a14="http://schemas.microsoft.com/office/drawing/2010/main">
+        <mc:Choice Requires="a14">
           <p:sp>
             <p:nvSpPr>
               <p:cNvPr id="3" name="Content Placeholder 2"/>
@@ -9879,7 +9879,7 @@
             </p:txBody>
           </p:sp>
         </mc:Choice>
-        <mc:Fallback>
+        <mc:Fallback xmlns="">
           <p:sp>
             <p:nvSpPr>
               <p:cNvPr id="3" name="Content Placeholder 2"/>
@@ -10131,8 +10131,8 @@
           <a:chExt cx="0" cy="0"/>
         </a:xfrm>
       </p:grpSpPr>
-      <mc:AlternateContent xmlns:mc="http://schemas.openxmlformats.org/markup-compatibility/2006">
-        <mc:Choice xmlns:a14="http://schemas.microsoft.com/office/drawing/2010/main" Requires="a14">
+      <mc:AlternateContent xmlns:mc="http://schemas.openxmlformats.org/markup-compatibility/2006" xmlns:a14="http://schemas.microsoft.com/office/drawing/2010/main">
+        <mc:Choice Requires="a14">
           <p:sp>
             <p:nvSpPr>
               <p:cNvPr id="3" name="Content Placeholder 2"/>
@@ -10780,7 +10780,7 @@
             </p:txBody>
           </p:sp>
         </mc:Choice>
-        <mc:Fallback>
+        <mc:Fallback xmlns="">
           <p:sp>
             <p:nvSpPr>
               <p:cNvPr id="3" name="Content Placeholder 2"/>
@@ -10891,8 +10891,8 @@
           <a:chExt cx="0" cy="0"/>
         </a:xfrm>
       </p:grpSpPr>
-      <mc:AlternateContent xmlns:mc="http://schemas.openxmlformats.org/markup-compatibility/2006">
-        <mc:Choice xmlns:a14="http://schemas.microsoft.com/office/drawing/2010/main" Requires="a14">
+      <mc:AlternateContent xmlns:mc="http://schemas.openxmlformats.org/markup-compatibility/2006" xmlns:a14="http://schemas.microsoft.com/office/drawing/2010/main">
+        <mc:Choice Requires="a14">
           <p:sp>
             <p:nvSpPr>
               <p:cNvPr id="3" name="Content Placeholder 2"/>
@@ -11326,7 +11326,7 @@
             </p:txBody>
           </p:sp>
         </mc:Choice>
-        <mc:Fallback>
+        <mc:Fallback xmlns="">
           <p:sp>
             <p:nvSpPr>
               <p:cNvPr id="3" name="Content Placeholder 2"/>
@@ -11437,8 +11437,8 @@
           <a:chExt cx="0" cy="0"/>
         </a:xfrm>
       </p:grpSpPr>
-      <mc:AlternateContent xmlns:mc="http://schemas.openxmlformats.org/markup-compatibility/2006">
-        <mc:Choice xmlns:a14="http://schemas.microsoft.com/office/drawing/2010/main" Requires="a14">
+      <mc:AlternateContent xmlns:mc="http://schemas.openxmlformats.org/markup-compatibility/2006" xmlns:a14="http://schemas.microsoft.com/office/drawing/2010/main">
+        <mc:Choice Requires="a14">
           <p:sp>
             <p:nvSpPr>
               <p:cNvPr id="3" name="Content Placeholder 2"/>
@@ -11582,7 +11582,7 @@
             </p:txBody>
           </p:sp>
         </mc:Choice>
-        <mc:Fallback>
+        <mc:Fallback xmlns="">
           <p:sp>
             <p:nvSpPr>
               <p:cNvPr id="3" name="Content Placeholder 2"/>
@@ -11693,8 +11693,8 @@
           <a:chExt cx="0" cy="0"/>
         </a:xfrm>
       </p:grpSpPr>
-      <mc:AlternateContent xmlns:mc="http://schemas.openxmlformats.org/markup-compatibility/2006">
-        <mc:Choice xmlns:a14="http://schemas.microsoft.com/office/drawing/2010/main" Requires="a14">
+      <mc:AlternateContent xmlns:mc="http://schemas.openxmlformats.org/markup-compatibility/2006" xmlns:a14="http://schemas.microsoft.com/office/drawing/2010/main">
+        <mc:Choice Requires="a14">
           <p:sp>
             <p:nvSpPr>
               <p:cNvPr id="3" name="Content Placeholder 2"/>
@@ -11754,7 +11754,7 @@
             </p:txBody>
           </p:sp>
         </mc:Choice>
-        <mc:Fallback>
+        <mc:Fallback xmlns="">
           <p:sp>
             <p:nvSpPr>
               <p:cNvPr id="3" name="Content Placeholder 2"/>
@@ -12493,8 +12493,8 @@
           </p:sp>
         </mc:Fallback>
       </mc:AlternateContent>
-      <mc:AlternateContent xmlns:mc="http://schemas.openxmlformats.org/markup-compatibility/2006">
-        <mc:Choice xmlns:a14="http://schemas.microsoft.com/office/drawing/2010/main" Requires="a14">
+      <mc:AlternateContent xmlns:mc="http://schemas.openxmlformats.org/markup-compatibility/2006" xmlns:a14="http://schemas.microsoft.com/office/drawing/2010/main">
+        <mc:Choice Requires="a14">
           <p:sp>
             <p:nvSpPr>
               <p:cNvPr id="7" name="TextBox 6"/>
@@ -12564,7 +12564,7 @@
             </p:txBody>
           </p:sp>
         </mc:Choice>
-        <mc:Fallback>
+        <mc:Fallback xmlns="">
           <p:sp>
             <p:nvSpPr>
               <p:cNvPr id="7" name="TextBox 6"/>
@@ -12700,8 +12700,8 @@
           <a:chExt cx="0" cy="0"/>
         </a:xfrm>
       </p:grpSpPr>
-      <mc:AlternateContent xmlns:mc="http://schemas.openxmlformats.org/markup-compatibility/2006">
-        <mc:Choice xmlns:a14="http://schemas.microsoft.com/office/drawing/2010/main" Requires="a14">
+      <mc:AlternateContent xmlns:mc="http://schemas.openxmlformats.org/markup-compatibility/2006" xmlns:a14="http://schemas.microsoft.com/office/drawing/2010/main">
+        <mc:Choice Requires="a14">
           <p:sp>
             <p:nvSpPr>
               <p:cNvPr id="4" name="Content Placeholder 2"/>
@@ -13032,7 +13032,7 @@
             </p:txBody>
           </p:sp>
         </mc:Choice>
-        <mc:Fallback>
+        <mc:Fallback xmlns="">
           <p:sp>
             <p:nvSpPr>
               <p:cNvPr id="4" name="Content Placeholder 2"/>
@@ -13768,8 +13768,8 @@
           <a:chExt cx="0" cy="0"/>
         </a:xfrm>
       </p:grpSpPr>
-      <mc:AlternateContent xmlns:mc="http://schemas.openxmlformats.org/markup-compatibility/2006">
-        <mc:Choice xmlns:a14="http://schemas.microsoft.com/office/drawing/2010/main" Requires="a14">
+      <mc:AlternateContent xmlns:mc="http://schemas.openxmlformats.org/markup-compatibility/2006" xmlns:a14="http://schemas.microsoft.com/office/drawing/2010/main">
+        <mc:Choice Requires="a14">
           <p:sp>
             <p:nvSpPr>
               <p:cNvPr id="3" name="Content Placeholder 2"/>
@@ -14861,7 +14861,7 @@
             </p:txBody>
           </p:sp>
         </mc:Choice>
-        <mc:Fallback>
+        <mc:Fallback xmlns="">
           <p:sp>
             <p:nvSpPr>
               <p:cNvPr id="3" name="Content Placeholder 2"/>
@@ -14981,8 +14981,8 @@
           <a:chExt cx="0" cy="0"/>
         </a:xfrm>
       </p:grpSpPr>
-      <mc:AlternateContent xmlns:mc="http://schemas.openxmlformats.org/markup-compatibility/2006">
-        <mc:Choice xmlns:a14="http://schemas.microsoft.com/office/drawing/2010/main" Requires="a14">
+      <mc:AlternateContent xmlns:mc="http://schemas.openxmlformats.org/markup-compatibility/2006" xmlns:a14="http://schemas.microsoft.com/office/drawing/2010/main">
+        <mc:Choice Requires="a14">
           <p:sp>
             <p:nvSpPr>
               <p:cNvPr id="3" name="Content Placeholder 2"/>
@@ -15173,7 +15173,7 @@
             </p:txBody>
           </p:sp>
         </mc:Choice>
-        <mc:Fallback>
+        <mc:Fallback xmlns="">
           <p:sp>
             <p:nvSpPr>
               <p:cNvPr id="3" name="Content Placeholder 2"/>
@@ -15438,8 +15438,8 @@
           </a:p>
         </p:txBody>
       </p:sp>
-      <mc:AlternateContent xmlns:mc="http://schemas.openxmlformats.org/markup-compatibility/2006">
-        <mc:Choice xmlns:a14="http://schemas.microsoft.com/office/drawing/2010/main" Requires="a14">
+      <mc:AlternateContent xmlns:mc="http://schemas.openxmlformats.org/markup-compatibility/2006" xmlns:a14="http://schemas.microsoft.com/office/drawing/2010/main">
+        <mc:Choice Requires="a14">
           <p:sp>
             <p:nvSpPr>
               <p:cNvPr id="8" name="TextBox 7"/>
@@ -15666,7 +15666,7 @@
             </p:txBody>
           </p:sp>
         </mc:Choice>
-        <mc:Fallback>
+        <mc:Fallback xmlns="">
           <p:sp>
             <p:nvSpPr>
               <p:cNvPr id="8" name="TextBox 7"/>
@@ -15735,8 +15735,8 @@
           <a:chExt cx="0" cy="0"/>
         </a:xfrm>
       </p:grpSpPr>
-      <mc:AlternateContent xmlns:mc="http://schemas.openxmlformats.org/markup-compatibility/2006">
-        <mc:Choice xmlns:a14="http://schemas.microsoft.com/office/drawing/2010/main" Requires="a14">
+      <mc:AlternateContent xmlns:mc="http://schemas.openxmlformats.org/markup-compatibility/2006" xmlns:a14="http://schemas.microsoft.com/office/drawing/2010/main">
+        <mc:Choice Requires="a14">
           <p:sp>
             <p:nvSpPr>
               <p:cNvPr id="3" name="Content Placeholder 2"/>
@@ -15862,7 +15862,7 @@
             </p:txBody>
           </p:sp>
         </mc:Choice>
-        <mc:Fallback>
+        <mc:Fallback xmlns="">
           <p:sp>
             <p:nvSpPr>
               <p:cNvPr id="3" name="Content Placeholder 2"/>
@@ -16495,13 +16495,13 @@
         </p:nvSpPr>
         <p:spPr>
           <a:xfrm>
-            <a:off x="790575" y="1605684"/>
+            <a:off x="704311" y="1683322"/>
             <a:ext cx="10306049" cy="3852141"/>
           </a:xfrm>
         </p:spPr>
         <p:txBody>
           <a:bodyPr>
-            <a:normAutofit fontScale="92500" lnSpcReduction="10000"/>
+            <a:normAutofit fontScale="85000" lnSpcReduction="20000"/>
           </a:bodyPr>
           <a:lstStyle/>
           <a:p>
@@ -16531,7 +16531,7 @@
           </a:p>
           <a:p>
             <a:r>
-              <a:rPr lang="en-GB" dirty="0">
+              <a:rPr lang="en-GB" sz="2600" dirty="0">
                 <a:latin typeface="Aptos" panose="020B0004020202020204" pitchFamily="34" charset="0"/>
               </a:rPr>
               <a:t>In this exercise, you will learn how to plot empirical variograms to test for residual spatial autocorrelation </a:t>
@@ -16539,23 +16539,31 @@
           </a:p>
           <a:p>
             <a:r>
-              <a:rPr lang="en-GB" dirty="0">
+              <a:rPr lang="en-GB" sz="2600" dirty="0">
                 <a:latin typeface="Aptos" panose="020B0004020202020204" pitchFamily="34" charset="0"/>
               </a:rPr>
               <a:t>The data used for this exercise were constructed to mimic cluster level </a:t>
             </a:r>
             <a:r>
-              <a:rPr lang="en-GB" dirty="0">
+              <a:rPr lang="en-GB" sz="2600" dirty="0">
                 <a:latin typeface="Aptos" panose="020B0004020202020204" pitchFamily="34" charset="0"/>
                 <a:hlinkClick r:id="rId2"/>
               </a:rPr>
               <a:t>Demographic and Health Survey (DHS) </a:t>
             </a:r>
             <a:r>
-              <a:rPr lang="en-GB" dirty="0">
+              <a:rPr lang="en-GB" sz="2600" dirty="0">
                 <a:latin typeface="Aptos" panose="020B0004020202020204" pitchFamily="34" charset="0"/>
               </a:rPr>
               <a:t>data for Nigeria. The data includes a binomial outcome showing assumed counts of numbers of children sampled from each cluster and corresponding assumed numbers of children who had been vaccinated. There are up to 1332 spatial locations in the data.</a:t>
+            </a:r>
+          </a:p>
+          <a:p>
+            <a:r>
+              <a:rPr lang="en-GB" sz="2600" dirty="0">
+                <a:latin typeface="Aptos" panose="020B0004020202020204" pitchFamily="34" charset="0"/>
+              </a:rPr>
+              <a:t>There are also covariates (precipitation, EVI, travel time to cities, etc) included in the data. The idea is that you fit a regression model using the covariates. Generate the residuals from the model and then use these to fit a variogram to test for residual spatial autocorrelation in the model. </a:t>
             </a:r>
           </a:p>
           <a:p>
@@ -17324,8 +17332,8 @@
           </a:p>
         </p:txBody>
       </p:sp>
-      <mc:AlternateContent xmlns:mc="http://schemas.openxmlformats.org/markup-compatibility/2006">
-        <mc:Choice xmlns:a14="http://schemas.microsoft.com/office/drawing/2010/main" Requires="a14">
+      <mc:AlternateContent xmlns:mc="http://schemas.openxmlformats.org/markup-compatibility/2006" xmlns:a14="http://schemas.microsoft.com/office/drawing/2010/main">
+        <mc:Choice Requires="a14">
           <p:sp>
             <p:nvSpPr>
               <p:cNvPr id="3" name="Content Placeholder 2"/>
@@ -17755,7 +17763,7 @@
             </p:txBody>
           </p:sp>
         </mc:Choice>
-        <mc:Fallback>
+        <mc:Fallback xmlns="">
           <p:sp>
             <p:nvSpPr>
               <p:cNvPr id="3" name="Content Placeholder 2"/>
@@ -17857,8 +17865,8 @@
           </a:p>
         </p:txBody>
       </p:sp>
-      <mc:AlternateContent xmlns:mc="http://schemas.openxmlformats.org/markup-compatibility/2006">
-        <mc:Choice xmlns:a14="http://schemas.microsoft.com/office/drawing/2010/main" Requires="a14">
+      <mc:AlternateContent xmlns:mc="http://schemas.openxmlformats.org/markup-compatibility/2006" xmlns:a14="http://schemas.microsoft.com/office/drawing/2010/main">
+        <mc:Choice Requires="a14">
           <p:sp>
             <p:nvSpPr>
               <p:cNvPr id="3" name="Content Placeholder 2"/>
@@ -18372,7 +18380,7 @@
             </p:txBody>
           </p:sp>
         </mc:Choice>
-        <mc:Fallback>
+        <mc:Fallback xmlns="">
           <p:sp>
             <p:nvSpPr>
               <p:cNvPr id="3" name="Content Placeholder 2"/>
@@ -18502,8 +18510,8 @@
           <a:chExt cx="0" cy="0"/>
         </a:xfrm>
       </p:grpSpPr>
-      <mc:AlternateContent xmlns:mc="http://schemas.openxmlformats.org/markup-compatibility/2006">
-        <mc:Choice xmlns:a14="http://schemas.microsoft.com/office/drawing/2010/main" Requires="a14">
+      <mc:AlternateContent xmlns:mc="http://schemas.openxmlformats.org/markup-compatibility/2006" xmlns:a14="http://schemas.microsoft.com/office/drawing/2010/main">
+        <mc:Choice Requires="a14">
           <p:sp>
             <p:nvSpPr>
               <p:cNvPr id="3" name="Content Placeholder 2"/>
@@ -19002,7 +19010,7 @@
             </p:txBody>
           </p:sp>
         </mc:Choice>
-        <mc:Fallback>
+        <mc:Fallback xmlns="">
           <p:sp>
             <p:nvSpPr>
               <p:cNvPr id="3" name="Content Placeholder 2"/>
@@ -19178,8 +19186,8 @@
           <a:chExt cx="0" cy="0"/>
         </a:xfrm>
       </p:grpSpPr>
-      <mc:AlternateContent xmlns:mc="http://schemas.openxmlformats.org/markup-compatibility/2006">
-        <mc:Choice xmlns:a14="http://schemas.microsoft.com/office/drawing/2010/main" Requires="a14">
+      <mc:AlternateContent xmlns:mc="http://schemas.openxmlformats.org/markup-compatibility/2006" xmlns:a14="http://schemas.microsoft.com/office/drawing/2010/main">
+        <mc:Choice Requires="a14">
           <p:sp>
             <p:nvSpPr>
               <p:cNvPr id="3" name="Content Placeholder 2"/>
@@ -19555,7 +19563,7 @@
             </p:txBody>
           </p:sp>
         </mc:Choice>
-        <mc:Fallback>
+        <mc:Fallback xmlns="">
           <p:sp>
             <p:nvSpPr>
               <p:cNvPr id="3" name="Content Placeholder 2"/>
@@ -19719,8 +19727,8 @@
           <a:chExt cx="0" cy="0"/>
         </a:xfrm>
       </p:grpSpPr>
-      <mc:AlternateContent xmlns:mc="http://schemas.openxmlformats.org/markup-compatibility/2006">
-        <mc:Choice xmlns:a14="http://schemas.microsoft.com/office/drawing/2010/main" Requires="a14">
+      <mc:AlternateContent xmlns:mc="http://schemas.openxmlformats.org/markup-compatibility/2006" xmlns:a14="http://schemas.microsoft.com/office/drawing/2010/main">
+        <mc:Choice Requires="a14">
           <p:sp>
             <p:nvSpPr>
               <p:cNvPr id="3" name="Content Placeholder 2"/>
@@ -20162,7 +20170,7 @@
             </p:txBody>
           </p:sp>
         </mc:Choice>
-        <mc:Fallback>
+        <mc:Fallback xmlns="">
           <p:sp>
             <p:nvSpPr>
               <p:cNvPr id="3" name="Content Placeholder 2"/>
